--- a/Gracenote报告解读_课堂汇报_最新版.pptx
+++ b/Gracenote报告解读_课堂汇报_最新版.pptx
@@ -117,13 +117,13 @@
   <p:extLst>
     <p:ext uri="{521415D9-36F7-43E2-AB2F-B90AF26B5E84}">
       <p14:sectionLst xmlns:p14="http://schemas.microsoft.com/office/powerpoint/2010/main">
-        <p14:section name="开场" id="{97239fd2-c71f-73b5-7472-4553ca9a861f}">
+        <p14:section name="开场" id="{4ea7df78-6e95-74b5-85a7-39fe2c7cf716}">
           <p14:sldIdLst>
             <p14:sldId id="256"/>
             <p14:sldId id="257"/>
           </p14:sldIdLst>
         </p14:section>
-        <p14:section name="报告介绍" id="{a27dfa1f-bc97-89d1-7153-cd2e80db35fc}">
+        <p14:section name="报告介绍" id="{26e2a4e5-ca59-542b-a8d9-ad394156ceb9}">
           <p14:sldIdLst>
             <p14:sldId id="258"/>
             <p14:sldId id="259"/>
@@ -131,7 +131,7 @@
             <p14:sldId id="261"/>
           </p14:sldIdLst>
         </p14:section>
-        <p14:section name="方法评价" id="{19a6c213-02fc-3434-0f39-ebd780569552}">
+        <p14:section name="方法评价" id="{89d23e3d-100c-f25f-edd6-677ee9e36a87}">
           <p14:sldIdLst>
             <p14:sldId id="262"/>
             <p14:sldId id="263"/>
@@ -139,7 +139,7 @@
             <p14:sldId id="265"/>
           </p14:sldIdLst>
         </p14:section>
-        <p14:section name="总结" id="{e617fb4b-0cab-8b2d-bcc4-e4a2f2b2f5e8}">
+        <p14:section name="总结" id="{d3484730-9183-532c-40f0-6c8b5ac69912}">
           <p14:sldIdLst>
             <p14:sldId id="266"/>
           </p14:sldIdLst>
@@ -6412,6 +6412,89 @@
       </p:sp>
       <p:sp>
         <p:nvSpPr>
+          <p:cNvPr id="20" name="报告出处"/>
+          <p:cNvSpPr txBox="1"/>
+          <p:nvPr/>
+        </p:nvSpPr>
+        <p:spPr>
+          <a:xfrm>
+            <a:off x="548640" y="5989320"/>
+            <a:ext cx="11064240" cy="274320"/>
+          </a:xfrm>
+          <a:prstGeom prst="rect">
+            <a:avLst/>
+          </a:prstGeom>
+          <a:noFill/>
+          <a:ln/>
+        </p:spPr>
+        <p:txBody>
+          <a:bodyPr wrap="square" lIns="0" tIns="0" rIns="0" bIns="0" rtlCol="0" anchor="ctr"/>
+          <a:lstStyle/>
+          <a:p>
+            <a:pPr indent="0" marL="0">
+              <a:buNone/>
+            </a:pPr>
+            <a:r>
+              <a:rPr lang="en-US" sz="1100" dirty="0">
+                <a:solidFill>
+                  <a:schemeClr val="accent5"/>
+                </a:solidFill>
+              </a:rPr>
+              <a:t>出处：Gracenote（Nielsen），TV Search and Discovery in the AI Era，2026 年 4 月。　</a:t>
+            </a:r>
+            <a:pPr indent="0" marL="0">
+              <a:buNone/>
+            </a:pPr>
+            <a:r>
+              <a:rPr lang="en-US" sz="1100" u="sng" dirty="0">
+                <a:solidFill>
+                  <a:schemeClr val="accent1"/>
+                </a:solidFill>
+                <a:hlinkClick r:id="rId2" invalidUrl="" action="" tgtFrame="" tooltip="https://s3.amazonaws.com/media.mediapost.com/uploads/GRACENOTE-2026-AI-report.pdf" history="1" highlightClick="0" endSnd="0">
+                  <a:extLst>
+                    <a:ext uri="{A12FA001-AC4F-418D-AE19-62706E023703}">
+                      <ahyp:hlinkClr xmlns:ahyp="http://schemas.microsoft.com/office/drawing/2018/hyperlinkcolor" val="tx"/>
+                    </a:ext>
+                  </a:extLst>
+                </a:hlinkClick>
+              </a:rPr>
+              <a:t>报告原文（PDF）</a:t>
+            </a:r>
+            <a:pPr indent="0" marL="0">
+              <a:buNone/>
+            </a:pPr>
+            <a:r>
+              <a:rPr lang="en-US" sz="1100" dirty="0">
+                <a:solidFill>
+                  <a:schemeClr val="accent5"/>
+                </a:solidFill>
+              </a:rPr>
+              <a:t>　｜　</a:t>
+            </a:r>
+            <a:pPr indent="0" marL="0">
+              <a:buNone/>
+            </a:pPr>
+            <a:r>
+              <a:rPr lang="en-US" sz="1100" u="sng" dirty="0">
+                <a:solidFill>
+                  <a:schemeClr val="accent1"/>
+                </a:solidFill>
+                <a:hlinkClick r:id="rId3" invalidUrl="" action="" tgtFrame="" tooltip="https://gracenote.com/newsroom/gen-alpha-leads-shift-to-ai-powered-entertainment-search-discovery-and-recommendations/" history="1" highlightClick="0" endSnd="0">
+                  <a:extLst>
+                    <a:ext uri="{A12FA001-AC4F-418D-AE19-62706E023703}">
+                      <ahyp:hlinkClr xmlns:ahyp="http://schemas.microsoft.com/office/drawing/2018/hyperlinkcolor" val="tx"/>
+                    </a:ext>
+                  </a:extLst>
+                </a:hlinkClick>
+              </a:rPr>
+              <a:t>Gracenote 发布页</a:t>
+            </a:r>
+            <a:endParaRPr lang="en-US" sz="1100" dirty="0"/>
+          </a:p>
+        </p:txBody>
+      </p:sp>
+      <p:sp>
+        <p:nvSpPr>
           <p:cNvPr id="25" name="Slide Number Placeholder 0"/>
           <p:cNvSpPr>
             <a:spLocks noGrp="1"/>
@@ -6481,7 +6564,7 @@
                       </p:stCondLst>
                       <p:childTnLst>
                         <p:par>
-                          <p:cTn id="37" fill="hold">
+                          <p:cTn id="40" fill="hold">
                             <p:stCondLst>
                               <p:cond delay="0"/>
                             </p:stCondLst>
@@ -6865,6 +6948,41 @@
                                         <p:cTn id="36" dur="500"/>
                                         <p:tgtEl>
                                           <p:spTgt spid="19"/>
+                                        </p:tgtEl>
+                                      </p:cBhvr>
+                                    </p:animEffect>
+                                  </p:childTnLst>
+                                </p:cTn>
+                              </p:par>
+                              <p:par>
+                                <p:cTn id="37" presetID="10" presetClass="entr" presetSubtype="0" fill="hold" grpId="0" nodeType="withEffect">
+                                  <p:stCondLst>
+                                    <p:cond delay="1950"/>
+                                  </p:stCondLst>
+                                  <p:childTnLst>
+                                    <p:set>
+                                      <p:cBhvr>
+                                        <p:cTn id="38" dur="1" fill="hold">
+                                          <p:stCondLst>
+                                            <p:cond delay="0"/>
+                                          </p:stCondLst>
+                                        </p:cTn>
+                                        <p:tgtEl>
+                                          <p:spTgt spid="20"/>
+                                        </p:tgtEl>
+                                        <p:attrNameLst>
+                                          <p:attrName>style.visibility</p:attrName>
+                                        </p:attrNameLst>
+                                      </p:cBhvr>
+                                      <p:to>
+                                        <p:strVal val="visible"/>
+                                      </p:to>
+                                    </p:set>
+                                    <p:animEffect transition="in" filter="fade">
+                                      <p:cBhvr>
+                                        <p:cTn id="39" dur="500"/>
+                                        <p:tgtEl>
+                                          <p:spTgt spid="20"/>
                                         </p:tgtEl>
                                       </p:cBhvr>
                                     </p:animEffect>
@@ -6909,6 +7027,7 @@
       <p:bldP spid="15" grpId="0" animBg="1"/>
       <p:bldP spid="17" grpId="0" animBg="1"/>
       <p:bldP spid="19" grpId="0" animBg="1"/>
+      <p:bldP spid="20" grpId="0" animBg="1"/>
     </p:bldLst>
   </p:timing>
 </p:sld>
@@ -14689,7 +14808,7 @@
         <p:spPr>
           <a:xfrm>
             <a:off x="548640" y="6035040"/>
-            <a:ext cx="10332720" cy="274320"/>
+            <a:ext cx="11064240" cy="274320"/>
           </a:xfrm>
           <a:prstGeom prst="rect">
             <a:avLst/>
@@ -14710,7 +14829,25 @@
                   <a:schemeClr val="accent5"/>
                 </a:solidFill>
               </a:rPr>
-              <a:t>来源：Gracenote 2025 年报告《State of Play》分国家数据（每国 500 人）。</a:t>
+              <a:t>来源：Gracenote 2025 年报告《State of Play》分国家数据（每国 500 人）。　</a:t>
+            </a:r>
+            <a:pPr indent="0" marL="0">
+              <a:buNone/>
+            </a:pPr>
+            <a:r>
+              <a:rPr lang="en-US" sz="1100" u="sng" dirty="0">
+                <a:solidFill>
+                  <a:schemeClr val="accent1"/>
+                </a:solidFill>
+                <a:hlinkClick r:id="rId2" invalidUrl="" action="" tgtFrame="" tooltip="https://s3.amazonaws.com/media.mediapost.com/uploads/gracenote-2025-state-of-play.pdf" history="1" highlightClick="0" endSnd="0">
+                  <a:extLst>
+                    <a:ext uri="{A12FA001-AC4F-418D-AE19-62706E023703}">
+                      <ahyp:hlinkClr xmlns:ahyp="http://schemas.microsoft.com/office/drawing/2018/hyperlinkcolor" val="tx"/>
+                    </a:ext>
+                  </a:extLst>
+                </a:hlinkClick>
+              </a:rPr>
+              <a:t>原文（PDF）</a:t>
             </a:r>
             <a:endParaRPr lang="en-US" sz="1100" dirty="0"/>
           </a:p>
@@ -15966,7 +16103,7 @@
         <p:spPr>
           <a:xfrm>
             <a:off x="548640" y="6035040"/>
-            <a:ext cx="10332720" cy="274320"/>
+            <a:ext cx="11064240" cy="274320"/>
           </a:xfrm>
           <a:prstGeom prst="rect">
             <a:avLst/>
@@ -15987,7 +16124,25 @@
                   <a:schemeClr val="accent5"/>
                 </a:solidFill>
               </a:rPr>
-              <a:t>来源：皮尤《Teens, Social Media and AI Chatbots 2025》数据表（使用者中每日使用 44%）。</a:t>
+              <a:t>来源：皮尤《Teens, Social Media and AI Chatbots 2025》数据表（使用者中每日使用 44%）。　</a:t>
+            </a:r>
+            <a:pPr indent="0" marL="0">
+              <a:buNone/>
+            </a:pPr>
+            <a:r>
+              <a:rPr lang="en-US" sz="1100" u="sng" dirty="0">
+                <a:solidFill>
+                  <a:schemeClr val="accent1"/>
+                </a:solidFill>
+                <a:hlinkClick r:id="rId1" invalidUrl="" action="" tgtFrame="" tooltip="https://www.pewresearch.org/internet/2025/12/09/teens-social-media-and-ai-chatbots-2025/" history="1" highlightClick="0" endSnd="0">
+                  <a:extLst>
+                    <a:ext uri="{A12FA001-AC4F-418D-AE19-62706E023703}">
+                      <ahyp:hlinkClr xmlns:ahyp="http://schemas.microsoft.com/office/drawing/2018/hyperlinkcolor" val="tx"/>
+                    </a:ext>
+                  </a:extLst>
+                </a:hlinkClick>
+              </a:rPr>
+              <a:t>原文</a:t>
             </a:r>
             <a:endParaRPr lang="en-US" sz="1100" dirty="0"/>
           </a:p>

--- a/Gracenote报告解读_课堂汇报_最新版.pptx
+++ b/Gracenote报告解读_课堂汇报_最新版.pptx
@@ -117,13 +117,13 @@
   <p:extLst>
     <p:ext uri="{521415D9-36F7-43E2-AB2F-B90AF26B5E84}">
       <p14:sectionLst xmlns:p14="http://schemas.microsoft.com/office/powerpoint/2010/main">
-        <p14:section name="开场" id="{4ea7df78-6e95-74b5-85a7-39fe2c7cf716}">
+        <p14:section name="开场" id="{d8013314-8862-3bb6-6545-9d0fd600cb53}">
           <p14:sldIdLst>
             <p14:sldId id="256"/>
             <p14:sldId id="257"/>
           </p14:sldIdLst>
         </p14:section>
-        <p14:section name="报告介绍" id="{26e2a4e5-ca59-542b-a8d9-ad394156ceb9}">
+        <p14:section name="报告介绍" id="{d1b5ede4-7bd0-e292-acb0-c7eabf4d4870}">
           <p14:sldIdLst>
             <p14:sldId id="258"/>
             <p14:sldId id="259"/>
@@ -131,7 +131,7 @@
             <p14:sldId id="261"/>
           </p14:sldIdLst>
         </p14:section>
-        <p14:section name="方法评价" id="{89d23e3d-100c-f25f-edd6-677ee9e36a87}">
+        <p14:section name="方法评价" id="{b8e63a53-5d9f-ca45-bfae-0ab37afae1cc}">
           <p14:sldIdLst>
             <p14:sldId id="262"/>
             <p14:sldId id="263"/>
@@ -139,7 +139,7 @@
             <p14:sldId id="265"/>
           </p14:sldIdLst>
         </p14:section>
-        <p14:section name="总结" id="{d3484730-9183-532c-40f0-6c8b5ac69912}">
+        <p14:section name="总结" id="{689e0e97-61a3-edf0-505c-6e93a157ff31}">
           <p14:sldIdLst>
             <p14:sldId id="266"/>
           </p14:sldIdLst>
@@ -6418,8 +6418,8 @@
         </p:nvSpPr>
         <p:spPr>
           <a:xfrm>
-            <a:off x="548640" y="5989320"/>
-            <a:ext cx="11064240" cy="274320"/>
+            <a:off x="548640" y="5852160"/>
+            <a:ext cx="11064240" cy="502920"/>
           </a:xfrm>
           <a:prstGeom prst="rect">
             <a:avLst/>
@@ -6440,54 +6440,21 @@
                   <a:schemeClr val="accent5"/>
                 </a:solidFill>
               </a:rPr>
-              <a:t>出处：Gracenote（Nielsen），TV Search and Discovery in the AI Era，2026 年 4 月。　</a:t>
-            </a:r>
+              <a:t>出处：Gracenote（Nielsen），TV Search and Discovery in the AI Era，2026 年 4 月</a:t>
+            </a:r>
+            <a:endParaRPr lang="en-US" sz="1100" dirty="0"/>
+          </a:p>
+          <a:p>
             <a:pPr indent="0" marL="0">
               <a:buNone/>
             </a:pPr>
             <a:r>
-              <a:rPr lang="en-US" sz="1100" u="sng" dirty="0">
-                <a:solidFill>
-                  <a:schemeClr val="accent1"/>
-                </a:solidFill>
-                <a:hlinkClick r:id="rId2" invalidUrl="" action="" tgtFrame="" tooltip="https://s3.amazonaws.com/media.mediapost.com/uploads/GRACENOTE-2026-AI-report.pdf" history="1" highlightClick="0" endSnd="0">
-                  <a:extLst>
-                    <a:ext uri="{A12FA001-AC4F-418D-AE19-62706E023703}">
-                      <ahyp:hlinkClr xmlns:ahyp="http://schemas.microsoft.com/office/drawing/2018/hyperlinkcolor" val="tx"/>
-                    </a:ext>
-                  </a:extLst>
-                </a:hlinkClick>
-              </a:rPr>
-              <a:t>报告原文（PDF）</a:t>
-            </a:r>
-            <a:pPr indent="0" marL="0">
-              <a:buNone/>
-            </a:pPr>
-            <a:r>
               <a:rPr lang="en-US" sz="1100" dirty="0">
                 <a:solidFill>
                   <a:schemeClr val="accent5"/>
                 </a:solidFill>
               </a:rPr>
-              <a:t>　｜　</a:t>
-            </a:r>
-            <a:pPr indent="0" marL="0">
-              <a:buNone/>
-            </a:pPr>
-            <a:r>
-              <a:rPr lang="en-US" sz="1100" u="sng" dirty="0">
-                <a:solidFill>
-                  <a:schemeClr val="accent1"/>
-                </a:solidFill>
-                <a:hlinkClick r:id="rId3" invalidUrl="" action="" tgtFrame="" tooltip="https://gracenote.com/newsroom/gen-alpha-leads-shift-to-ai-powered-entertainment-search-discovery-and-recommendations/" history="1" highlightClick="0" endSnd="0">
-                  <a:extLst>
-                    <a:ext uri="{A12FA001-AC4F-418D-AE19-62706E023703}">
-                      <ahyp:hlinkClr xmlns:ahyp="http://schemas.microsoft.com/office/drawing/2018/hyperlinkcolor" val="tx"/>
-                    </a:ext>
-                  </a:extLst>
-                </a:hlinkClick>
-              </a:rPr>
-              <a:t>Gracenote 发布页</a:t>
+              <a:t>原文：s3.amazonaws.com/media.mediapost.com/uploads/GRACENOTE-2026-AI-report.pdf</a:t>
             </a:r>
             <a:endParaRPr lang="en-US" sz="1100" dirty="0"/>
           </a:p>
@@ -14807,8 +14774,8 @@
         </p:nvSpPr>
         <p:spPr>
           <a:xfrm>
-            <a:off x="548640" y="6035040"/>
-            <a:ext cx="11064240" cy="274320"/>
+            <a:off x="548640" y="5852160"/>
+            <a:ext cx="11064240" cy="502920"/>
           </a:xfrm>
           <a:prstGeom prst="rect">
             <a:avLst/>
@@ -14829,25 +14796,21 @@
                   <a:schemeClr val="accent5"/>
                 </a:solidFill>
               </a:rPr>
-              <a:t>来源：Gracenote 2025 年报告《State of Play》分国家数据（每国 500 人）。　</a:t>
-            </a:r>
+              <a:t>来源：Gracenote 2025 年报告《State of Play》分国家数据（每国 500 人）</a:t>
+            </a:r>
+            <a:endParaRPr lang="en-US" sz="1100" dirty="0"/>
+          </a:p>
+          <a:p>
             <a:pPr indent="0" marL="0">
               <a:buNone/>
             </a:pPr>
             <a:r>
-              <a:rPr lang="en-US" sz="1100" u="sng" dirty="0">
-                <a:solidFill>
-                  <a:schemeClr val="accent1"/>
-                </a:solidFill>
-                <a:hlinkClick r:id="rId2" invalidUrl="" action="" tgtFrame="" tooltip="https://s3.amazonaws.com/media.mediapost.com/uploads/gracenote-2025-state-of-play.pdf" history="1" highlightClick="0" endSnd="0">
-                  <a:extLst>
-                    <a:ext uri="{A12FA001-AC4F-418D-AE19-62706E023703}">
-                      <ahyp:hlinkClr xmlns:ahyp="http://schemas.microsoft.com/office/drawing/2018/hyperlinkcolor" val="tx"/>
-                    </a:ext>
-                  </a:extLst>
-                </a:hlinkClick>
-              </a:rPr>
-              <a:t>原文（PDF）</a:t>
+              <a:rPr lang="en-US" sz="1100" dirty="0">
+                <a:solidFill>
+                  <a:schemeClr val="accent5"/>
+                </a:solidFill>
+              </a:rPr>
+              <a:t>原文：s3.amazonaws.com/media.mediapost.com/uploads/gracenote-2025-state-of-play.pdf</a:t>
             </a:r>
             <a:endParaRPr lang="en-US" sz="1100" dirty="0"/>
           </a:p>
@@ -16102,8 +16065,8 @@
         </p:nvSpPr>
         <p:spPr>
           <a:xfrm>
-            <a:off x="548640" y="6035040"/>
-            <a:ext cx="11064240" cy="274320"/>
+            <a:off x="548640" y="5852160"/>
+            <a:ext cx="11064240" cy="502920"/>
           </a:xfrm>
           <a:prstGeom prst="rect">
             <a:avLst/>
@@ -16124,25 +16087,21 @@
                   <a:schemeClr val="accent5"/>
                 </a:solidFill>
               </a:rPr>
-              <a:t>来源：皮尤《Teens, Social Media and AI Chatbots 2025》数据表（使用者中每日使用 44%）。　</a:t>
-            </a:r>
+              <a:t>来源：皮尤《Teens, Social Media and AI Chatbots 2025》（使用者中每日使用 44%）</a:t>
+            </a:r>
+            <a:endParaRPr lang="en-US" sz="1100" dirty="0"/>
+          </a:p>
+          <a:p>
             <a:pPr indent="0" marL="0">
               <a:buNone/>
             </a:pPr>
             <a:r>
-              <a:rPr lang="en-US" sz="1100" u="sng" dirty="0">
-                <a:solidFill>
-                  <a:schemeClr val="accent1"/>
-                </a:solidFill>
-                <a:hlinkClick r:id="rId1" invalidUrl="" action="" tgtFrame="" tooltip="https://www.pewresearch.org/internet/2025/12/09/teens-social-media-and-ai-chatbots-2025/" history="1" highlightClick="0" endSnd="0">
-                  <a:extLst>
-                    <a:ext uri="{A12FA001-AC4F-418D-AE19-62706E023703}">
-                      <ahyp:hlinkClr xmlns:ahyp="http://schemas.microsoft.com/office/drawing/2018/hyperlinkcolor" val="tx"/>
-                    </a:ext>
-                  </a:extLst>
-                </a:hlinkClick>
-              </a:rPr>
-              <a:t>原文</a:t>
+              <a:rPr lang="en-US" sz="1100" dirty="0">
+                <a:solidFill>
+                  <a:schemeClr val="accent5"/>
+                </a:solidFill>
+              </a:rPr>
+              <a:t>原文：pewresearch.org/internet/2025/12/09/teens-social-media-and-ai-chatbots-2025</a:t>
             </a:r>
             <a:endParaRPr lang="en-US" sz="1100" dirty="0"/>
           </a:p>
